--- a/25007＿大平凜音.pptx
+++ b/25007＿大平凜音.pptx
@@ -5,7 +5,7 @@
     <p:sldMasterId id="2147483648" r:id="rId1"/>
   </p:sldMasterIdLst>
   <p:notesMasterIdLst>
-    <p:notesMasterId r:id="rId17"/>
+    <p:notesMasterId r:id="rId18"/>
   </p:notesMasterIdLst>
   <p:sldIdLst>
     <p:sldId id="256" r:id="rId2"/>
@@ -21,8 +21,9 @@
     <p:sldId id="269" r:id="rId12"/>
     <p:sldId id="270" r:id="rId13"/>
     <p:sldId id="265" r:id="rId14"/>
-    <p:sldId id="261" r:id="rId15"/>
-    <p:sldId id="262" r:id="rId16"/>
+    <p:sldId id="271" r:id="rId15"/>
+    <p:sldId id="261" r:id="rId16"/>
+    <p:sldId id="262" r:id="rId17"/>
   </p:sldIdLst>
   <p:sldSz cx="12192000" cy="6858000"/>
   <p:notesSz cx="6858000" cy="9144000"/>
@@ -256,8 +257,11 @@
     </a:lvl9pPr>
   </p:defaultTextStyle>
   <p:extLst>
+    <p:ext uri="{EFAFB233-063F-42B5-8137-9DF3F51BA10A}">
+      <p15:sldGuideLst xmlns:p15="http://schemas.microsoft.com/office/powerpoint/2012/main"/>
+    </p:ext>
     <p:ext uri="GoogleSlidesCustomDataVersion2">
-      <go:slidesCustomData xmlns:go="http://customooxmlschemas.google.com/" xmlns:ahyp="http://schemas.microsoft.com/office/drawing/2018/hyperlinkcolor" xmlns:p15="http://schemas.microsoft.com/office/powerpoint/2012/main" xmlns:p14="http://schemas.microsoft.com/office/powerpoint/2010/main" xmlns:com="http://schemas.openxmlformats.org/drawingml/2006/compatibility" xmlns:pvml="urn:schemas-microsoft-com:office:powerpoint" xmlns:v="urn:schemas-microsoft-com:vml" xmlns:o="urn:schemas-microsoft-com:office:office" xmlns:dgm="http://schemas.openxmlformats.org/drawingml/2006/diagram" xmlns:c="http://schemas.openxmlformats.org/drawingml/2006/chart" xmlns:mv="urn:schemas-microsoft-com:mac:vml" xmlns:mc="http://schemas.openxmlformats.org/markup-compatibility/2006" xmlns="" r:id="rId18" roundtripDataSignature="AMtx7mi2GVzQ6ylFYSL9kg7xdGVUkVHKSA=="/>
+      <go:slidesCustomData xmlns="" xmlns:mc="http://schemas.openxmlformats.org/markup-compatibility/2006" xmlns:mv="urn:schemas-microsoft-com:mac:vml" xmlns:c="http://schemas.openxmlformats.org/drawingml/2006/chart" xmlns:dgm="http://schemas.openxmlformats.org/drawingml/2006/diagram" xmlns:o="urn:schemas-microsoft-com:office:office" xmlns:v="urn:schemas-microsoft-com:vml" xmlns:pvml="urn:schemas-microsoft-com:office:powerpoint" xmlns:com="http://schemas.openxmlformats.org/drawingml/2006/compatibility" xmlns:p14="http://schemas.microsoft.com/office/powerpoint/2010/main" xmlns:p15="http://schemas.microsoft.com/office/powerpoint/2012/main" xmlns:ahyp="http://schemas.microsoft.com/office/drawing/2018/hyperlinkcolor" xmlns:go="http://customooxmlschemas.google.com/" r:id="rId19" roundtripDataSignature="AMtx7mi2GVzQ6ylFYSL9kg7xdGVUkVHKSA=="/>
     </p:ext>
   </p:extLst>
 </p:presentation>
@@ -15121,7 +15125,7 @@
               <a:rPr lang="ja-JP"/>
               <a:t>発表</a:t>
             </a:r>
-            <a:endParaRPr/>
+            <a:endParaRPr dirty="0"/>
           </a:p>
         </p:txBody>
       </p:sp>
@@ -15153,29 +15157,6 @@
             <a:normAutofit/>
           </a:bodyPr>
           <a:lstStyle/>
-          <a:p>
-            <a:pPr marL="0" lvl="0" indent="0" algn="ctr" rtl="0">
-              <a:lnSpc>
-                <a:spcPct val="90000"/>
-              </a:lnSpc>
-              <a:spcBef>
-                <a:spcPts val="1000"/>
-              </a:spcBef>
-              <a:spcAft>
-                <a:spcPts val="0"/>
-              </a:spcAft>
-              <a:buClr>
-                <a:schemeClr val="dk1"/>
-              </a:buClr>
-              <a:buSzPts val="1800"/>
-              <a:buNone/>
-            </a:pPr>
-            <a:r>
-              <a:rPr lang="ja-JP" dirty="0"/>
-              <a:t>学籍番号_名前</a:t>
-            </a:r>
-            <a:endParaRPr lang="en-US" altLang="ja-JP" dirty="0"/>
-          </a:p>
           <a:p>
             <a:pPr marL="0" lvl="0" indent="0" algn="ctr" rtl="0">
               <a:lnSpc>
@@ -15330,6 +15311,9 @@
             <a:endParaRPr lang="en-US" altLang="ja-JP" dirty="0"/>
           </a:p>
           <a:p>
+            <a:pPr marL="114300" indent="0">
+              <a:buNone/>
+            </a:pPr>
             <a:r>
               <a:rPr lang="ja-JP" altLang="ja-JP" dirty="0"/>
               <a:t>モチベーションが上昇傾向にあること</a:t>
@@ -15357,6 +15341,9 @@
             <a:endParaRPr lang="en-US" altLang="ja-JP" dirty="0"/>
           </a:p>
           <a:p>
+            <a:pPr marL="114300" indent="0">
+              <a:buNone/>
+            </a:pPr>
             <a:r>
               <a:rPr lang="ja-JP" altLang="ja-JP" dirty="0"/>
               <a:t>「日中は暑い</a:t>
@@ -15668,12 +15655,12 @@
         <p:spPr>
           <a:xfrm>
             <a:off x="125506" y="1690688"/>
-            <a:ext cx="12066493" cy="4802187"/>
+            <a:ext cx="12066493" cy="5048779"/>
           </a:xfrm>
         </p:spPr>
         <p:txBody>
           <a:bodyPr>
-            <a:normAutofit/>
+            <a:normAutofit lnSpcReduction="10000"/>
           </a:bodyPr>
           <a:lstStyle/>
           <a:p>
@@ -15735,6 +15722,24 @@
             <a:r>
               <a:rPr lang="ja-JP" altLang="ja-JP" dirty="0"/>
               <a:t>・穴場も紹介してもっと夜の外出先を探している人が、行ってみたい場所を見つけられるサイトを目指す</a:t>
+            </a:r>
+            <a:endParaRPr lang="en-US" altLang="ja-JP"/>
+          </a:p>
+          <a:p>
+            <a:pPr marL="114300" indent="0">
+              <a:buNone/>
+            </a:pPr>
+            <a:endParaRPr lang="en-US" altLang="ja-JP" dirty="0"/>
+          </a:p>
+          <a:p>
+            <a:pPr marL="114300" indent="0">
+              <a:buNone/>
+            </a:pPr>
+            <a:r>
+              <a:rPr kumimoji="1" lang="ja-JP" altLang="en-US" dirty="0">
+                <a:hlinkClick r:id="rId2"/>
+              </a:rPr>
+              <a:t>福岡県の夜景紹介</a:t>
             </a:r>
             <a:endParaRPr kumimoji="1" lang="ja-JP" altLang="en-US" dirty="0"/>
           </a:p>
@@ -15981,6 +15986,196 @@
 </file>
 
 <file path=ppt/slides/slide14.xml><?xml version="1.0" encoding="utf-8"?>
+<p:sld xmlns:a="http://schemas.openxmlformats.org/drawingml/2006/main" xmlns:r="http://schemas.openxmlformats.org/officeDocument/2006/relationships" xmlns:p="http://schemas.openxmlformats.org/presentationml/2006/main">
+  <p:cSld>
+    <p:spTree>
+      <p:nvGrpSpPr>
+        <p:cNvPr id="1" name=""/>
+        <p:cNvGrpSpPr/>
+        <p:nvPr/>
+      </p:nvGrpSpPr>
+      <p:grpSpPr>
+        <a:xfrm>
+          <a:off x="0" y="0"/>
+          <a:ext cx="0" cy="0"/>
+          <a:chOff x="0" y="0"/>
+          <a:chExt cx="0" cy="0"/>
+        </a:xfrm>
+      </p:grpSpPr>
+      <p:sp>
+        <p:nvSpPr>
+          <p:cNvPr id="2" name="タイトル 1">
+            <a:extLst>
+              <a:ext uri="{FF2B5EF4-FFF2-40B4-BE49-F238E27FC236}">
+                <a16:creationId xmlns:a16="http://schemas.microsoft.com/office/drawing/2014/main" id="{ECF11A5C-954B-350D-CF23-F472F3C71C34}"/>
+              </a:ext>
+            </a:extLst>
+          </p:cNvPr>
+          <p:cNvSpPr>
+            <a:spLocks noGrp="1"/>
+          </p:cNvSpPr>
+          <p:nvPr>
+            <p:ph type="title"/>
+          </p:nvPr>
+        </p:nvSpPr>
+        <p:spPr/>
+        <p:txBody>
+          <a:bodyPr/>
+          <a:lstStyle/>
+          <a:p>
+            <a:r>
+              <a:rPr kumimoji="1" lang="ja-JP" altLang="en-US" dirty="0"/>
+              <a:t>これからやること</a:t>
+            </a:r>
+          </a:p>
+        </p:txBody>
+      </p:sp>
+      <p:sp>
+        <p:nvSpPr>
+          <p:cNvPr id="3" name="テキスト プレースホルダー 2">
+            <a:extLst>
+              <a:ext uri="{FF2B5EF4-FFF2-40B4-BE49-F238E27FC236}">
+                <a16:creationId xmlns:a16="http://schemas.microsoft.com/office/drawing/2014/main" id="{34FFCCCD-F0E3-B713-5E28-3BFCB22979C0}"/>
+              </a:ext>
+            </a:extLst>
+          </p:cNvPr>
+          <p:cNvSpPr>
+            <a:spLocks noGrp="1"/>
+          </p:cNvSpPr>
+          <p:nvPr>
+            <p:ph type="body" idx="1"/>
+          </p:nvPr>
+        </p:nvSpPr>
+        <p:spPr>
+          <a:xfrm>
+            <a:off x="838200" y="1690688"/>
+            <a:ext cx="10515600" cy="4351338"/>
+          </a:xfrm>
+        </p:spPr>
+        <p:txBody>
+          <a:bodyPr>
+            <a:normAutofit fontScale="62500" lnSpcReduction="20000"/>
+          </a:bodyPr>
+          <a:lstStyle/>
+          <a:p>
+            <a:pPr marL="114300" indent="0">
+              <a:buNone/>
+            </a:pPr>
+            <a:r>
+              <a:rPr lang="ja-JP" altLang="ja-JP" dirty="0"/>
+              <a:t>現在、Webサイトの基本的な部分は完成しているが、以下の作業が残っている。</a:t>
+            </a:r>
+            <a:endParaRPr lang="en-US" altLang="ja-JP" dirty="0"/>
+          </a:p>
+          <a:p>
+            <a:endParaRPr lang="ja-JP" altLang="ja-JP" dirty="0"/>
+          </a:p>
+          <a:p>
+            <a:pPr marL="114300" indent="0">
+              <a:buNone/>
+            </a:pPr>
+            <a:r>
+              <a:rPr lang="ja-JP" altLang="ja-JP" dirty="0"/>
+              <a:t>・各ページの文章の最終確認</a:t>
+            </a:r>
+            <a:endParaRPr lang="en-US" altLang="ja-JP" dirty="0"/>
+          </a:p>
+          <a:p>
+            <a:pPr marL="114300" indent="0">
+              <a:buNone/>
+            </a:pPr>
+            <a:br>
+              <a:rPr lang="ja-JP" altLang="ja-JP" dirty="0"/>
+            </a:br>
+            <a:r>
+              <a:rPr lang="ja-JP" altLang="ja-JP" dirty="0"/>
+              <a:t>・画像や写真の追加・調整</a:t>
+            </a:r>
+            <a:endParaRPr lang="en-US" altLang="ja-JP" dirty="0"/>
+          </a:p>
+          <a:p>
+            <a:pPr marL="114300" indent="0">
+              <a:buNone/>
+            </a:pPr>
+            <a:br>
+              <a:rPr lang="ja-JP" altLang="ja-JP" dirty="0"/>
+            </a:br>
+            <a:r>
+              <a:rPr lang="ja-JP" altLang="ja-JP" dirty="0"/>
+              <a:t>・カロリーや基礎代謝についての内容の見直し</a:t>
+            </a:r>
+            <a:endParaRPr lang="en-US" altLang="ja-JP" dirty="0"/>
+          </a:p>
+          <a:p>
+            <a:pPr marL="114300" indent="0">
+              <a:buNone/>
+            </a:pPr>
+            <a:br>
+              <a:rPr lang="ja-JP" altLang="ja-JP" dirty="0"/>
+            </a:br>
+            <a:r>
+              <a:rPr lang="ja-JP" altLang="ja-JP" dirty="0"/>
+              <a:t>・各ページのデザイン調整</a:t>
+            </a:r>
+            <a:endParaRPr lang="en-US" altLang="ja-JP" dirty="0"/>
+          </a:p>
+          <a:p>
+            <a:pPr marL="114300" indent="0">
+              <a:buNone/>
+            </a:pPr>
+            <a:br>
+              <a:rPr lang="ja-JP" altLang="ja-JP" dirty="0"/>
+            </a:br>
+            <a:r>
+              <a:rPr lang="ja-JP" altLang="ja-JP" dirty="0"/>
+              <a:t>・スマートフォンでの表示確認</a:t>
+            </a:r>
+            <a:endParaRPr lang="en-US" altLang="ja-JP" dirty="0"/>
+          </a:p>
+          <a:p>
+            <a:pPr marL="114300" indent="0">
+              <a:buNone/>
+            </a:pPr>
+            <a:br>
+              <a:rPr lang="ja-JP" altLang="ja-JP" dirty="0"/>
+            </a:br>
+            <a:r>
+              <a:rPr lang="ja-JP" altLang="ja-JP" dirty="0"/>
+              <a:t>・ページリンクやボタンの動作確認</a:t>
+            </a:r>
+            <a:endParaRPr lang="en-US" altLang="ja-JP" dirty="0"/>
+          </a:p>
+          <a:p>
+            <a:pPr marL="114300" indent="0">
+              <a:buNone/>
+            </a:pPr>
+            <a:br>
+              <a:rPr lang="ja-JP" altLang="ja-JP" dirty="0"/>
+            </a:br>
+            <a:r>
+              <a:rPr lang="ja-JP" altLang="ja-JP" dirty="0"/>
+              <a:t>・Webサイト全体の最終的な修正</a:t>
+            </a:r>
+          </a:p>
+          <a:p>
+            <a:endParaRPr kumimoji="1" lang="ja-JP" altLang="en-US" dirty="0"/>
+          </a:p>
+        </p:txBody>
+      </p:sp>
+    </p:spTree>
+    <p:extLst>
+      <p:ext uri="{BB962C8B-B14F-4D97-AF65-F5344CB8AC3E}">
+        <p14:creationId xmlns:p14="http://schemas.microsoft.com/office/powerpoint/2010/main" val="2459493548"/>
+      </p:ext>
+    </p:extLst>
+  </p:cSld>
+  <p:clrMapOvr>
+    <a:masterClrMapping/>
+  </p:clrMapOvr>
+</p:sld>
+</file>
+
+<file path=ppt/slides/slide15.xml><?xml version="1.0" encoding="utf-8"?>
 <p:sld xmlns:a="http://schemas.openxmlformats.org/drawingml/2006/main" xmlns:r="http://schemas.openxmlformats.org/officeDocument/2006/relationships" xmlns:p="http://schemas.openxmlformats.org/presentationml/2006/main">
   <p:cSld>
     <p:spTree>
@@ -16461,7 +16656,7 @@
 </p:sld>
 </file>
 
-<file path=ppt/slides/slide15.xml><?xml version="1.0" encoding="utf-8"?>
+<file path=ppt/slides/slide16.xml><?xml version="1.0" encoding="utf-8"?>
 <p:sld xmlns:a="http://schemas.openxmlformats.org/drawingml/2006/main" xmlns:r="http://schemas.openxmlformats.org/officeDocument/2006/relationships" xmlns:p="http://schemas.openxmlformats.org/presentationml/2006/main">
   <p:cSld>
     <p:spTree>
@@ -17989,12 +18184,14 @@
         </p:nvSpPr>
         <p:spPr>
           <a:xfrm>
-            <a:off x="838199" y="1825625"/>
-            <a:ext cx="10968789" cy="4351338"/>
+            <a:off x="524933" y="1825625"/>
+            <a:ext cx="11282055" cy="4667250"/>
           </a:xfrm>
         </p:spPr>
         <p:txBody>
-          <a:bodyPr/>
+          <a:bodyPr>
+            <a:normAutofit lnSpcReduction="10000"/>
+          </a:bodyPr>
           <a:lstStyle/>
           <a:p>
             <a:r>
@@ -18049,6 +18246,33 @@
               <a:rPr lang="ja-JP" altLang="ja-JP" dirty="0"/>
               <a:t>おすすめの食材のランキングやメニューのランキングを掲載。</a:t>
             </a:r>
+            <a:endParaRPr lang="en-US" altLang="ja-JP" dirty="0"/>
+          </a:p>
+          <a:p>
+            <a:endParaRPr lang="en-US" altLang="ja-JP" dirty="0"/>
+          </a:p>
+          <a:p>
+            <a:pPr marL="114300" indent="0">
+              <a:buNone/>
+            </a:pPr>
+            <a:r>
+              <a:rPr kumimoji="1" lang="en-US" altLang="ja-JP" dirty="0">
+                <a:hlinkClick r:id="rId3"/>
+              </a:rPr>
+              <a:t>13</a:t>
+            </a:r>
+            <a:r>
+              <a:rPr kumimoji="1" lang="ja-JP" altLang="en-US" dirty="0">
+                <a:hlinkClick r:id="rId3"/>
+              </a:rPr>
+              <a:t>キロやせた方法</a:t>
+            </a:r>
+            <a:endParaRPr kumimoji="1" lang="en-US" altLang="ja-JP" dirty="0"/>
+          </a:p>
+          <a:p>
+            <a:pPr marL="114300" indent="0">
+              <a:buNone/>
+            </a:pPr>
             <a:endParaRPr kumimoji="1" lang="ja-JP" altLang="en-US" dirty="0"/>
           </a:p>
         </p:txBody>
